--- a/docs/實驗室本地LLM使用教學.pptx
+++ b/docs/實驗室本地LLM使用教學.pptx
@@ -28,6 +28,7 @@
     <p:sldId id="276" r:id="rId28"/>
     <p:sldId id="277" r:id="rId29"/>
     <p:sldId id="278" r:id="rId30"/>
+    <p:sldId id="279" r:id="rId31"/>
   </p:sldIdLst>
   <p:sldSz cx="12191695" cy="6858000" type="screen4x3"/>
   <p:notesSz cx="6858000" cy="9144000"/>
@@ -1530,6 +1531,76 @@
 </file>
 
 <file path=ppt/notesSlides/notesSlide23.xml><?xml version="1.0" encoding="utf-8"?>
+<p:notes xmlns:a="http://schemas.openxmlformats.org/drawingml/2006/main" xmlns:p="http://schemas.openxmlformats.org/presentationml/2006/main" xmlns:r="http://schemas.openxmlformats.org/officeDocument/2006/relationships">
+  <p:cSld>
+    <p:spTree>
+      <p:nvGrpSpPr>
+        <p:cNvPr id="1" name=""/>
+        <p:cNvGrpSpPr/>
+        <p:nvPr/>
+      </p:nvGrpSpPr>
+      <p:grpSpPr>
+        <a:xfrm>
+          <a:off x="0" y="0"/>
+          <a:ext cx="0" cy="0"/>
+          <a:chOff x="0" y="0"/>
+          <a:chExt cx="0" cy="0"/>
+        </a:xfrm>
+      </p:grpSpPr>
+      <p:sp>
+        <p:nvSpPr>
+          <p:cNvPr id="2" name="Slide Image Placeholder 1"/>
+          <p:cNvSpPr>
+            <a:spLocks noGrp="1"/>
+          </p:cNvSpPr>
+          <p:nvPr>
+            <p:ph type="sldImg" idx="2"/>
+          </p:nvPr>
+        </p:nvSpPr>
+        <p:spPr/>
+      </p:sp>
+      <p:sp>
+        <p:nvSpPr>
+          <p:cNvPr id="3" name="Notes Placeholder 2"/>
+          <p:cNvSpPr>
+            <a:spLocks noGrp="1"/>
+          </p:cNvSpPr>
+          <p:nvPr>
+            <p:ph type="body" idx="3" sz="quarter"/>
+          </p:nvPr>
+        </p:nvSpPr>
+        <p:spPr/>
+        <p:txBody>
+          <a:bodyPr/>
+          <a:lstStyle/>
+          <a:p>
+            <a:r>
+              <a:t>setup-host 第一次安裝時，會先把電源、WSL 網路模式、OpenSSH 的原本狀態備份起來。uninstall-host 就照這份備份還原，並移除 vLLM、排程、防火牆規則和這台的 opencode。用舊版安裝、沒有備份的話，電源會改回 Windows 預設值，結束時會列出來。repo 的檔案和你自己下載的模型都不會動。</a:t>
+            </a:r>
+          </a:p>
+        </p:txBody>
+      </p:sp>
+      <p:sp>
+        <p:nvSpPr>
+          <p:cNvPr id="4" name="Slide Number Placeholder 3"/>
+          <p:cNvSpPr>
+            <a:spLocks noGrp="1"/>
+          </p:cNvSpPr>
+          <p:nvPr>
+            <p:ph type="sldNum" idx="5" sz="quarter"/>
+          </p:nvPr>
+        </p:nvSpPr>
+        <p:spPr/>
+      </p:sp>
+    </p:spTree>
+  </p:cSld>
+  <p:clrMapOvr>
+    <a:masterClrMapping/>
+  </p:clrMapOvr>
+</p:notes>
+</file>
+
+<file path=ppt/notesSlides/notesSlide24.xml><?xml version="1.0" encoding="utf-8"?>
 <p:notes xmlns:a="http://schemas.openxmlformats.org/drawingml/2006/main" xmlns:p="http://schemas.openxmlformats.org/presentationml/2006/main" xmlns:r="http://schemas.openxmlformats.org/officeDocument/2006/relationships">
   <p:cSld>
     <p:spTree>
@@ -16176,7 +16247,7 @@
                 <a:latin typeface="微軟正黑體"/>
                 <a:ea typeface="微軟正黑體"/>
               </a:rPr>
-              <a:t>金鑰、換模型、安全性、疑難排解</a:t>
+              <a:t>金鑰、換模型、排錯、解除安裝</a:t>
             </a:r>
           </a:p>
         </p:txBody>
@@ -19455,6 +19526,1176 @@
     <p:bg>
       <p:bgPr>
         <a:solidFill>
+          <a:srgbClr val="F6F5F1"/>
+        </a:solidFill>
+        <a:effectLst/>
+      </p:bgPr>
+    </p:bg>
+    <p:spTree>
+      <p:nvGrpSpPr>
+        <p:cNvPr id="1" name=""/>
+        <p:cNvGrpSpPr/>
+        <p:nvPr/>
+      </p:nvGrpSpPr>
+      <p:grpSpPr/>
+      <p:sp>
+        <p:nvSpPr>
+          <p:cNvPr id="2" name="TextBox 1"/>
+          <p:cNvSpPr txBox="1"/>
+          <p:nvPr/>
+        </p:nvSpPr>
+        <p:spPr>
+          <a:xfrm>
+            <a:off x="548640" y="411480"/>
+            <a:ext cx="11094415" cy="274320"/>
+          </a:xfrm>
+          <a:prstGeom prst="rect">
+            <a:avLst/>
+          </a:prstGeom>
+          <a:noFill/>
+        </p:spPr>
+        <p:txBody>
+          <a:bodyPr wrap="square" anchor="t" lIns="0" rIns="0" tIns="0" bIns="0">
+            <a:spAutoFit/>
+          </a:bodyPr>
+          <a:lstStyle/>
+          <a:p>
+            <a:pPr algn="l">
+              <a:spcAft>
+                <a:spcPts val="600"/>
+              </a:spcAft>
+            </a:pPr>
+            <a:r>
+              <a:rPr sz="1200" b="1">
+                <a:solidFill>
+                  <a:srgbClr val="2563C9"/>
+                </a:solidFill>
+                <a:latin typeface="微軟正黑體"/>
+                <a:ea typeface="微軟正黑體"/>
+              </a:rPr>
+              <a:t>06 管理與排錯 · 解除安裝</a:t>
+            </a:r>
+          </a:p>
+        </p:txBody>
+      </p:sp>
+      <p:sp>
+        <p:nvSpPr>
+          <p:cNvPr id="3" name="TextBox 2"/>
+          <p:cNvSpPr txBox="1"/>
+          <p:nvPr/>
+        </p:nvSpPr>
+        <p:spPr>
+          <a:xfrm>
+            <a:off x="548640" y="713232"/>
+            <a:ext cx="11094415" cy="640080"/>
+          </a:xfrm>
+          <a:prstGeom prst="rect">
+            <a:avLst/>
+          </a:prstGeom>
+          <a:noFill/>
+        </p:spPr>
+        <p:txBody>
+          <a:bodyPr wrap="square" anchor="t" lIns="0" rIns="0" tIns="0" bIns="0">
+            <a:spAutoFit/>
+          </a:bodyPr>
+          <a:lstStyle/>
+          <a:p>
+            <a:pPr algn="l">
+              <a:spcAft>
+                <a:spcPts val="600"/>
+              </a:spcAft>
+            </a:pPr>
+            <a:r>
+              <a:rPr sz="3000" b="1">
+                <a:solidFill>
+                  <a:srgbClr val="1B2433"/>
+                </a:solidFill>
+                <a:latin typeface="微軟正黑體"/>
+                <a:ea typeface="微軟正黑體"/>
+              </a:rPr>
+              <a:t>解除安裝並還原原本的設定</a:t>
+            </a:r>
+          </a:p>
+        </p:txBody>
+      </p:sp>
+      <p:sp>
+        <p:nvSpPr>
+          <p:cNvPr id="4" name="TextBox 3"/>
+          <p:cNvSpPr txBox="1"/>
+          <p:nvPr/>
+        </p:nvSpPr>
+        <p:spPr>
+          <a:xfrm>
+            <a:off x="548640" y="6400800"/>
+            <a:ext cx="5486400" cy="228600"/>
+          </a:xfrm>
+          <a:prstGeom prst="rect">
+            <a:avLst/>
+          </a:prstGeom>
+          <a:noFill/>
+        </p:spPr>
+        <p:txBody>
+          <a:bodyPr wrap="square" anchor="t" lIns="0" rIns="0" tIns="0" bIns="0">
+            <a:spAutoFit/>
+          </a:bodyPr>
+          <a:lstStyle/>
+          <a:p>
+            <a:pPr algn="l">
+              <a:spcAft>
+                <a:spcPts val="600"/>
+              </a:spcAft>
+            </a:pPr>
+            <a:r>
+              <a:rPr sz="1000" b="0">
+                <a:solidFill>
+                  <a:srgbClr val="8B9BB4"/>
+                </a:solidFill>
+                <a:latin typeface="微軟正黑體"/>
+                <a:ea typeface="微軟正黑體"/>
+              </a:rPr>
+              <a:t>實驗室本地 LLM 使用教學 · 23</a:t>
+            </a:r>
+          </a:p>
+        </p:txBody>
+      </p:sp>
+      <p:sp>
+        <p:nvSpPr>
+          <p:cNvPr id="5" name="Rounded Rectangle 4"/>
+          <p:cNvSpPr/>
+          <p:nvPr/>
+        </p:nvSpPr>
+        <p:spPr>
+          <a:xfrm>
+            <a:off x="548640" y="1600200"/>
+            <a:ext cx="5120640" cy="4023360"/>
+          </a:xfrm>
+          <a:prstGeom prst="roundRect">
+            <a:avLst>
+              <a:gd name="adj" fmla="val 4000"/>
+            </a:avLst>
+          </a:prstGeom>
+          <a:solidFill>
+            <a:srgbClr val="1B2433"/>
+          </a:solidFill>
+          <a:ln>
+            <a:noFill/>
+          </a:ln>
+          <a:effectLst/>
+        </p:spPr>
+        <p:style>
+          <a:lnRef idx="1">
+            <a:schemeClr val="accent1"/>
+          </a:lnRef>
+          <a:fillRef idx="3">
+            <a:schemeClr val="accent1"/>
+          </a:fillRef>
+          <a:effectRef idx="2">
+            <a:schemeClr val="accent1"/>
+          </a:effectRef>
+          <a:fontRef idx="minor">
+            <a:schemeClr val="lt1"/>
+          </a:fontRef>
+        </p:style>
+        <p:txBody>
+          <a:bodyPr rtlCol="0" anchor="ctr"/>
+          <a:lstStyle/>
+          <a:p/>
+        </p:txBody>
+      </p:sp>
+      <p:sp>
+        <p:nvSpPr>
+          <p:cNvPr id="6" name="TextBox 5"/>
+          <p:cNvSpPr txBox="1"/>
+          <p:nvPr/>
+        </p:nvSpPr>
+        <p:spPr>
+          <a:xfrm>
+            <a:off x="822960" y="1828800"/>
+            <a:ext cx="4572000" cy="3566160"/>
+          </a:xfrm>
+          <a:prstGeom prst="rect">
+            <a:avLst/>
+          </a:prstGeom>
+          <a:noFill/>
+        </p:spPr>
+        <p:txBody>
+          <a:bodyPr wrap="square" anchor="t" lIns="0" rIns="0" tIns="0" bIns="0">
+            <a:spAutoFit/>
+          </a:bodyPr>
+          <a:lstStyle/>
+          <a:p>
+            <a:pPr algn="l">
+              <a:spcAft>
+                <a:spcPts val="400"/>
+              </a:spcAft>
+            </a:pPr>
+            <a:r>
+              <a:rPr sz="1300" b="0">
+                <a:solidFill>
+                  <a:srgbClr val="8B9BB4"/>
+                </a:solidFill>
+                <a:latin typeface="Consolas"/>
+                <a:ea typeface="微軟正黑體"/>
+              </a:rPr>
+              <a:t># 筆電（主機），會要求系統管理員權限</a:t>
+            </a:r>
+          </a:p>
+          <a:p>
+            <a:pPr algn="l">
+              <a:spcAft>
+                <a:spcPts val="400"/>
+              </a:spcAft>
+            </a:pPr>
+            <a:r>
+              <a:rPr sz="1300" b="1">
+                <a:solidFill>
+                  <a:srgbClr val="F0A04B"/>
+                </a:solidFill>
+                <a:latin typeface="Consolas"/>
+                <a:ea typeface="微軟正黑體"/>
+              </a:rPr>
+              <a:t>opencode\host\uninstall-host.cmd</a:t>
+            </a:r>
+          </a:p>
+          <a:p>
+            <a:pPr algn="l">
+              <a:spcAft>
+                <a:spcPts val="400"/>
+              </a:spcAft>
+            </a:pPr>
+            <a:r>
+              <a:rPr sz="1300" b="0">
+                <a:solidFill>
+                  <a:srgbClr val="8B9BB4"/>
+                </a:solidFill>
+                <a:latin typeface="Consolas"/>
+                <a:ea typeface="微軟正黑體"/>
+              </a:rPr>
+              <a:t># 看過清單後輸入 y</a:t>
+            </a:r>
+          </a:p>
+          <a:p>
+            <a:pPr algn="l">
+              <a:spcAft>
+                <a:spcPts val="400"/>
+              </a:spcAft>
+            </a:pPr>
+            <a:r>
+              <a:rPr sz="1300" b="0">
+                <a:solidFill>
+                  <a:srgbClr val="E6E9EF"/>
+                </a:solidFill>
+                <a:latin typeface="Consolas"/>
+                <a:ea typeface="微軟正黑體"/>
+              </a:rPr>
+              <a:t/>
+            </a:r>
+          </a:p>
+          <a:p>
+            <a:pPr algn="l">
+              <a:spcAft>
+                <a:spcPts val="400"/>
+              </a:spcAft>
+            </a:pPr>
+            <a:r>
+              <a:rPr sz="1300" b="0">
+                <a:solidFill>
+                  <a:srgbClr val="8B9BB4"/>
+                </a:solidFill>
+                <a:latin typeface="Consolas"/>
+                <a:ea typeface="微軟正黑體"/>
+              </a:rPr>
+              <a:t># 常用參數</a:t>
+            </a:r>
+          </a:p>
+          <a:p>
+            <a:pPr algn="l">
+              <a:spcAft>
+                <a:spcPts val="400"/>
+              </a:spcAft>
+            </a:pPr>
+            <a:r>
+              <a:rPr sz="1300" b="1">
+                <a:solidFill>
+                  <a:srgbClr val="F0A04B"/>
+                </a:solidFill>
+                <a:latin typeface="Consolas"/>
+                <a:ea typeface="微軟正黑體"/>
+              </a:rPr>
+              <a:t>-KeepModels      # 保留模型</a:t>
+            </a:r>
+          </a:p>
+          <a:p>
+            <a:pPr algn="l">
+              <a:spcAft>
+                <a:spcPts val="400"/>
+              </a:spcAft>
+            </a:pPr>
+            <a:r>
+              <a:rPr sz="1300" b="1">
+                <a:solidFill>
+                  <a:srgbClr val="F0A04B"/>
+                </a:solidFill>
+                <a:latin typeface="Consolas"/>
+                <a:ea typeface="微軟正黑體"/>
+              </a:rPr>
+              <a:t>-KeepOpencode    # 保留這台的 opencode</a:t>
+            </a:r>
+          </a:p>
+          <a:p>
+            <a:pPr algn="l">
+              <a:spcAft>
+                <a:spcPts val="400"/>
+              </a:spcAft>
+            </a:pPr>
+            <a:r>
+              <a:rPr sz="1300" b="1">
+                <a:solidFill>
+                  <a:srgbClr val="F0A04B"/>
+                </a:solidFill>
+                <a:latin typeface="Consolas"/>
+                <a:ea typeface="微軟正黑體"/>
+              </a:rPr>
+              <a:t>-RemoveWsl       # 整個刪除 Ubuntu</a:t>
+            </a:r>
+          </a:p>
+          <a:p>
+            <a:pPr algn="l">
+              <a:spcAft>
+                <a:spcPts val="400"/>
+              </a:spcAft>
+            </a:pPr>
+            <a:r>
+              <a:rPr sz="1300" b="0">
+                <a:solidFill>
+                  <a:srgbClr val="E6E9EF"/>
+                </a:solidFill>
+                <a:latin typeface="Consolas"/>
+                <a:ea typeface="微軟正黑體"/>
+              </a:rPr>
+              <a:t/>
+            </a:r>
+          </a:p>
+          <a:p>
+            <a:pPr algn="l">
+              <a:spcAft>
+                <a:spcPts val="400"/>
+              </a:spcAft>
+            </a:pPr>
+            <a:r>
+              <a:rPr sz="1300" b="0">
+                <a:solidFill>
+                  <a:srgbClr val="8B9BB4"/>
+                </a:solidFill>
+                <a:latin typeface="Consolas"/>
+                <a:ea typeface="微軟正黑體"/>
+              </a:rPr>
+              <a:t># 同學的電腦</a:t>
+            </a:r>
+          </a:p>
+          <a:p>
+            <a:pPr algn="l">
+              <a:spcAft>
+                <a:spcPts val="400"/>
+              </a:spcAft>
+            </a:pPr>
+            <a:r>
+              <a:rPr sz="1300" b="1">
+                <a:solidFill>
+                  <a:srgbClr val="F0A04B"/>
+                </a:solidFill>
+                <a:latin typeface="Consolas"/>
+                <a:ea typeface="微軟正黑體"/>
+              </a:rPr>
+              <a:t>opencode\client\uninstall-client.cmd</a:t>
+            </a:r>
+          </a:p>
+        </p:txBody>
+      </p:sp>
+      <p:graphicFrame>
+        <p:nvGraphicFramePr>
+          <p:cNvPr id="7" name="Table 6"/>
+          <p:cNvGraphicFramePr>
+            <a:graphicFrameLocks noGrp="1"/>
+          </p:cNvGraphicFramePr>
+          <p:nvPr/>
+        </p:nvGraphicFramePr>
+        <p:xfrm>
+          <a:off x="5943600" y="1600200"/>
+          <a:ext cx="5699454" cy="3657600"/>
+        </p:xfrm>
+        <a:graphic>
+          <a:graphicData uri="http://schemas.openxmlformats.org/drawingml/2006/table">
+            <a:tbl>
+              <a:tblPr firstRow="0" bandRow="0">
+                <a:tableStyleId>{5940675A-B579-460E-94D1-54222C63F5DA}</a:tableStyleId>
+              </a:tblPr>
+              <a:tblGrid>
+                <a:gridCol w="2161862"/>
+                <a:gridCol w="3537592"/>
+              </a:tblGrid>
+              <a:tr h="457200">
+                <a:tc>
+                  <a:txBody>
+                    <a:bodyPr wrap="square"/>
+                    <a:lstStyle/>
+                    <a:p>
+                      <a:r>
+                        <a:rPr sz="1300" b="1">
+                          <a:solidFill>
+                            <a:srgbClr val="1B2433"/>
+                          </a:solidFill>
+                          <a:latin typeface="微軟正黑體"/>
+                          <a:ea typeface="微軟正黑體"/>
+                        </a:rPr>
+                        <a:t>項目</a:t>
+                      </a:r>
+                    </a:p>
+                  </a:txBody>
+                  <a:tcPr marL="109728" marR="109728" marT="45720" marB="45720" anchor="ctr">
+                    <a:lnL w="9525">
+                      <a:solidFill>
+                        <a:srgbClr val="E2DFD8"/>
+                      </a:solidFill>
+                    </a:lnL>
+                    <a:lnR w="9525">
+                      <a:solidFill>
+                        <a:srgbClr val="E2DFD8"/>
+                      </a:solidFill>
+                    </a:lnR>
+                    <a:lnT w="9525">
+                      <a:solidFill>
+                        <a:srgbClr val="E2DFD8"/>
+                      </a:solidFill>
+                    </a:lnT>
+                    <a:lnB w="9525">
+                      <a:solidFill>
+                        <a:srgbClr val="E2DFD8"/>
+                      </a:solidFill>
+                    </a:lnB>
+                    <a:solidFill>
+                      <a:srgbClr val="E6EDF8"/>
+                    </a:solidFill>
+                  </a:tcPr>
+                </a:tc>
+                <a:tc>
+                  <a:txBody>
+                    <a:bodyPr wrap="square"/>
+                    <a:lstStyle/>
+                    <a:p>
+                      <a:r>
+                        <a:rPr sz="1300" b="1">
+                          <a:solidFill>
+                            <a:srgbClr val="1B2433"/>
+                          </a:solidFill>
+                          <a:latin typeface="微軟正黑體"/>
+                          <a:ea typeface="微軟正黑體"/>
+                        </a:rPr>
+                        <a:t>移除 / 還原</a:t>
+                      </a:r>
+                    </a:p>
+                  </a:txBody>
+                  <a:tcPr marL="109728" marR="109728" marT="45720" marB="45720" anchor="ctr">
+                    <a:lnL w="9525">
+                      <a:solidFill>
+                        <a:srgbClr val="E2DFD8"/>
+                      </a:solidFill>
+                    </a:lnL>
+                    <a:lnR w="9525">
+                      <a:solidFill>
+                        <a:srgbClr val="E2DFD8"/>
+                      </a:solidFill>
+                    </a:lnR>
+                    <a:lnT w="9525">
+                      <a:solidFill>
+                        <a:srgbClr val="E2DFD8"/>
+                      </a:solidFill>
+                    </a:lnT>
+                    <a:lnB w="9525">
+                      <a:solidFill>
+                        <a:srgbClr val="E2DFD8"/>
+                      </a:solidFill>
+                    </a:lnB>
+                    <a:solidFill>
+                      <a:srgbClr val="E6EDF8"/>
+                    </a:solidFill>
+                  </a:tcPr>
+                </a:tc>
+              </a:tr>
+              <a:tr h="457200">
+                <a:tc>
+                  <a:txBody>
+                    <a:bodyPr wrap="square"/>
+                    <a:lstStyle/>
+                    <a:p>
+                      <a:r>
+                        <a:rPr sz="1300" b="0">
+                          <a:solidFill>
+                            <a:srgbClr val="4A5568"/>
+                          </a:solidFill>
+                          <a:latin typeface="微軟正黑體"/>
+                          <a:ea typeface="微軟正黑體"/>
+                        </a:rPr>
+                        <a:t>排程</a:t>
+                      </a:r>
+                    </a:p>
+                  </a:txBody>
+                  <a:tcPr marL="109728" marR="109728" marT="45720" marB="45720" anchor="ctr">
+                    <a:lnL w="9525">
+                      <a:solidFill>
+                        <a:srgbClr val="E2DFD8"/>
+                      </a:solidFill>
+                    </a:lnL>
+                    <a:lnR w="9525">
+                      <a:solidFill>
+                        <a:srgbClr val="E2DFD8"/>
+                      </a:solidFill>
+                    </a:lnR>
+                    <a:lnT w="9525">
+                      <a:solidFill>
+                        <a:srgbClr val="E2DFD8"/>
+                      </a:solidFill>
+                    </a:lnT>
+                    <a:lnB w="9525">
+                      <a:solidFill>
+                        <a:srgbClr val="E2DFD8"/>
+                      </a:solidFill>
+                    </a:lnB>
+                    <a:solidFill>
+                      <a:srgbClr val="FDFCF9"/>
+                    </a:solidFill>
+                  </a:tcPr>
+                </a:tc>
+                <a:tc>
+                  <a:txBody>
+                    <a:bodyPr wrap="square"/>
+                    <a:lstStyle/>
+                    <a:p>
+                      <a:r>
+                        <a:rPr sz="1300" b="0">
+                          <a:solidFill>
+                            <a:srgbClr val="4A5568"/>
+                          </a:solidFill>
+                          <a:latin typeface="微軟正黑體"/>
+                          <a:ea typeface="微軟正黑體"/>
+                        </a:rPr>
+                        <a:t>vLLM 常駐、Discord bot</a:t>
+                      </a:r>
+                    </a:p>
+                  </a:txBody>
+                  <a:tcPr marL="109728" marR="109728" marT="45720" marB="45720" anchor="ctr">
+                    <a:lnL w="9525">
+                      <a:solidFill>
+                        <a:srgbClr val="E2DFD8"/>
+                      </a:solidFill>
+                    </a:lnL>
+                    <a:lnR w="9525">
+                      <a:solidFill>
+                        <a:srgbClr val="E2DFD8"/>
+                      </a:solidFill>
+                    </a:lnR>
+                    <a:lnT w="9525">
+                      <a:solidFill>
+                        <a:srgbClr val="E2DFD8"/>
+                      </a:solidFill>
+                    </a:lnT>
+                    <a:lnB w="9525">
+                      <a:solidFill>
+                        <a:srgbClr val="E2DFD8"/>
+                      </a:solidFill>
+                    </a:lnB>
+                    <a:solidFill>
+                      <a:srgbClr val="FDFCF9"/>
+                    </a:solidFill>
+                  </a:tcPr>
+                </a:tc>
+              </a:tr>
+              <a:tr h="457200">
+                <a:tc>
+                  <a:txBody>
+                    <a:bodyPr wrap="square"/>
+                    <a:lstStyle/>
+                    <a:p>
+                      <a:r>
+                        <a:rPr sz="1300" b="0">
+                          <a:solidFill>
+                            <a:srgbClr val="4A5568"/>
+                          </a:solidFill>
+                          <a:latin typeface="微軟正黑體"/>
+                          <a:ea typeface="微軟正黑體"/>
+                        </a:rPr>
+                        <a:t>WSL 裡的 vLLM</a:t>
+                      </a:r>
+                    </a:p>
+                  </a:txBody>
+                  <a:tcPr marL="109728" marR="109728" marT="45720" marB="45720" anchor="ctr">
+                    <a:lnL w="9525">
+                      <a:solidFill>
+                        <a:srgbClr val="E2DFD8"/>
+                      </a:solidFill>
+                    </a:lnL>
+                    <a:lnR w="9525">
+                      <a:solidFill>
+                        <a:srgbClr val="E2DFD8"/>
+                      </a:solidFill>
+                    </a:lnR>
+                    <a:lnT w="9525">
+                      <a:solidFill>
+                        <a:srgbClr val="E2DFD8"/>
+                      </a:solidFill>
+                    </a:lnT>
+                    <a:lnB w="9525">
+                      <a:solidFill>
+                        <a:srgbClr val="E2DFD8"/>
+                      </a:solidFill>
+                    </a:lnB>
+                    <a:solidFill>
+                      <a:srgbClr val="FDFCF9"/>
+                    </a:solidFill>
+                  </a:tcPr>
+                </a:tc>
+                <a:tc>
+                  <a:txBody>
+                    <a:bodyPr wrap="square"/>
+                    <a:lstStyle/>
+                    <a:p>
+                      <a:r>
+                        <a:rPr sz="1300" b="0">
+                          <a:solidFill>
+                            <a:srgbClr val="4A5568"/>
+                          </a:solidFill>
+                          <a:latin typeface="微軟正黑體"/>
+                          <a:ea typeface="微軟正黑體"/>
+                        </a:rPr>
+                        <a:t>服務、設定、金鑰、下載的模型</a:t>
+                      </a:r>
+                    </a:p>
+                  </a:txBody>
+                  <a:tcPr marL="109728" marR="109728" marT="45720" marB="45720" anchor="ctr">
+                    <a:lnL w="9525">
+                      <a:solidFill>
+                        <a:srgbClr val="E2DFD8"/>
+                      </a:solidFill>
+                    </a:lnL>
+                    <a:lnR w="9525">
+                      <a:solidFill>
+                        <a:srgbClr val="E2DFD8"/>
+                      </a:solidFill>
+                    </a:lnR>
+                    <a:lnT w="9525">
+                      <a:solidFill>
+                        <a:srgbClr val="E2DFD8"/>
+                      </a:solidFill>
+                    </a:lnT>
+                    <a:lnB w="9525">
+                      <a:solidFill>
+                        <a:srgbClr val="E2DFD8"/>
+                      </a:solidFill>
+                    </a:lnB>
+                    <a:solidFill>
+                      <a:srgbClr val="FDFCF9"/>
+                    </a:solidFill>
+                  </a:tcPr>
+                </a:tc>
+              </a:tr>
+              <a:tr h="457200">
+                <a:tc>
+                  <a:txBody>
+                    <a:bodyPr wrap="square"/>
+                    <a:lstStyle/>
+                    <a:p>
+                      <a:r>
+                        <a:rPr sz="1300" b="0">
+                          <a:solidFill>
+                            <a:srgbClr val="4A5568"/>
+                          </a:solidFill>
+                          <a:latin typeface="微軟正黑體"/>
+                          <a:ea typeface="微軟正黑體"/>
+                        </a:rPr>
+                        <a:t>防火牆</a:t>
+                      </a:r>
+                    </a:p>
+                  </a:txBody>
+                  <a:tcPr marL="109728" marR="109728" marT="45720" marB="45720" anchor="ctr">
+                    <a:lnL w="9525">
+                      <a:solidFill>
+                        <a:srgbClr val="E2DFD8"/>
+                      </a:solidFill>
+                    </a:lnL>
+                    <a:lnR w="9525">
+                      <a:solidFill>
+                        <a:srgbClr val="E2DFD8"/>
+                      </a:solidFill>
+                    </a:lnR>
+                    <a:lnT w="9525">
+                      <a:solidFill>
+                        <a:srgbClr val="E2DFD8"/>
+                      </a:solidFill>
+                    </a:lnT>
+                    <a:lnB w="9525">
+                      <a:solidFill>
+                        <a:srgbClr val="E2DFD8"/>
+                      </a:solidFill>
+                    </a:lnB>
+                    <a:solidFill>
+                      <a:srgbClr val="FDFCF9"/>
+                    </a:solidFill>
+                  </a:tcPr>
+                </a:tc>
+                <a:tc>
+                  <a:txBody>
+                    <a:bodyPr wrap="square"/>
+                    <a:lstStyle/>
+                    <a:p>
+                      <a:r>
+                        <a:rPr sz="1300" b="0">
+                          <a:solidFill>
+                            <a:srgbClr val="4A5568"/>
+                          </a:solidFill>
+                          <a:latin typeface="微軟正黑體"/>
+                          <a:ea typeface="微軟正黑體"/>
+                        </a:rPr>
+                        <a:t>vLLM-opencode-8000</a:t>
+                      </a:r>
+                    </a:p>
+                  </a:txBody>
+                  <a:tcPr marL="109728" marR="109728" marT="45720" marB="45720" anchor="ctr">
+                    <a:lnL w="9525">
+                      <a:solidFill>
+                        <a:srgbClr val="E2DFD8"/>
+                      </a:solidFill>
+                    </a:lnL>
+                    <a:lnR w="9525">
+                      <a:solidFill>
+                        <a:srgbClr val="E2DFD8"/>
+                      </a:solidFill>
+                    </a:lnR>
+                    <a:lnT w="9525">
+                      <a:solidFill>
+                        <a:srgbClr val="E2DFD8"/>
+                      </a:solidFill>
+                    </a:lnT>
+                    <a:lnB w="9525">
+                      <a:solidFill>
+                        <a:srgbClr val="E2DFD8"/>
+                      </a:solidFill>
+                    </a:lnB>
+                    <a:solidFill>
+                      <a:srgbClr val="FDFCF9"/>
+                    </a:solidFill>
+                  </a:tcPr>
+                </a:tc>
+              </a:tr>
+              <a:tr h="457200">
+                <a:tc>
+                  <a:txBody>
+                    <a:bodyPr wrap="square"/>
+                    <a:lstStyle/>
+                    <a:p>
+                      <a:r>
+                        <a:rPr sz="1300" b="0">
+                          <a:solidFill>
+                            <a:srgbClr val="4A5568"/>
+                          </a:solidFill>
+                          <a:latin typeface="微軟正黑體"/>
+                          <a:ea typeface="微軟正黑體"/>
+                        </a:rPr>
+                        <a:t>.wslconfig</a:t>
+                      </a:r>
+                    </a:p>
+                  </a:txBody>
+                  <a:tcPr marL="109728" marR="109728" marT="45720" marB="45720" anchor="ctr">
+                    <a:lnL w="9525">
+                      <a:solidFill>
+                        <a:srgbClr val="E2DFD8"/>
+                      </a:solidFill>
+                    </a:lnL>
+                    <a:lnR w="9525">
+                      <a:solidFill>
+                        <a:srgbClr val="E2DFD8"/>
+                      </a:solidFill>
+                    </a:lnR>
+                    <a:lnT w="9525">
+                      <a:solidFill>
+                        <a:srgbClr val="E2DFD8"/>
+                      </a:solidFill>
+                    </a:lnT>
+                    <a:lnB w="9525">
+                      <a:solidFill>
+                        <a:srgbClr val="E2DFD8"/>
+                      </a:solidFill>
+                    </a:lnB>
+                    <a:solidFill>
+                      <a:srgbClr val="FDFCF9"/>
+                    </a:solidFill>
+                  </a:tcPr>
+                </a:tc>
+                <a:tc>
+                  <a:txBody>
+                    <a:bodyPr wrap="square"/>
+                    <a:lstStyle/>
+                    <a:p>
+                      <a:r>
+                        <a:rPr sz="1300" b="0">
+                          <a:solidFill>
+                            <a:srgbClr val="4A5568"/>
+                          </a:solidFill>
+                          <a:latin typeface="微軟正黑體"/>
+                          <a:ea typeface="微軟正黑體"/>
+                        </a:rPr>
+                        <a:t>網路模式還原成安裝前</a:t>
+                      </a:r>
+                    </a:p>
+                  </a:txBody>
+                  <a:tcPr marL="109728" marR="109728" marT="45720" marB="45720" anchor="ctr">
+                    <a:lnL w="9525">
+                      <a:solidFill>
+                        <a:srgbClr val="E2DFD8"/>
+                      </a:solidFill>
+                    </a:lnL>
+                    <a:lnR w="9525">
+                      <a:solidFill>
+                        <a:srgbClr val="E2DFD8"/>
+                      </a:solidFill>
+                    </a:lnR>
+                    <a:lnT w="9525">
+                      <a:solidFill>
+                        <a:srgbClr val="E2DFD8"/>
+                      </a:solidFill>
+                    </a:lnT>
+                    <a:lnB w="9525">
+                      <a:solidFill>
+                        <a:srgbClr val="E2DFD8"/>
+                      </a:solidFill>
+                    </a:lnB>
+                    <a:solidFill>
+                      <a:srgbClr val="FDFCF9"/>
+                    </a:solidFill>
+                  </a:tcPr>
+                </a:tc>
+              </a:tr>
+              <a:tr h="457200">
+                <a:tc>
+                  <a:txBody>
+                    <a:bodyPr wrap="square"/>
+                    <a:lstStyle/>
+                    <a:p>
+                      <a:r>
+                        <a:rPr sz="1300" b="0">
+                          <a:solidFill>
+                            <a:srgbClr val="4A5568"/>
+                          </a:solidFill>
+                          <a:latin typeface="微軟正黑體"/>
+                          <a:ea typeface="微軟正黑體"/>
+                        </a:rPr>
+                        <a:t>電源</a:t>
+                      </a:r>
+                    </a:p>
+                  </a:txBody>
+                  <a:tcPr marL="109728" marR="109728" marT="45720" marB="45720" anchor="ctr">
+                    <a:lnL w="9525">
+                      <a:solidFill>
+                        <a:srgbClr val="E2DFD8"/>
+                      </a:solidFill>
+                    </a:lnL>
+                    <a:lnR w="9525">
+                      <a:solidFill>
+                        <a:srgbClr val="E2DFD8"/>
+                      </a:solidFill>
+                    </a:lnR>
+                    <a:lnT w="9525">
+                      <a:solidFill>
+                        <a:srgbClr val="E2DFD8"/>
+                      </a:solidFill>
+                    </a:lnT>
+                    <a:lnB w="9525">
+                      <a:solidFill>
+                        <a:srgbClr val="E2DFD8"/>
+                      </a:solidFill>
+                    </a:lnB>
+                    <a:solidFill>
+                      <a:srgbClr val="FDFCF9"/>
+                    </a:solidFill>
+                  </a:tcPr>
+                </a:tc>
+                <a:tc>
+                  <a:txBody>
+                    <a:bodyPr wrap="square"/>
+                    <a:lstStyle/>
+                    <a:p>
+                      <a:r>
+                        <a:rPr sz="1300" b="0">
+                          <a:solidFill>
+                            <a:srgbClr val="4A5568"/>
+                          </a:solidFill>
+                          <a:latin typeface="微軟正黑體"/>
+                          <a:ea typeface="微軟正黑體"/>
+                        </a:rPr>
+                        <a:t>睡眠 / 休眠 / 闔上螢幕還原</a:t>
+                      </a:r>
+                    </a:p>
+                  </a:txBody>
+                  <a:tcPr marL="109728" marR="109728" marT="45720" marB="45720" anchor="ctr">
+                    <a:lnL w="9525">
+                      <a:solidFill>
+                        <a:srgbClr val="E2DFD8"/>
+                      </a:solidFill>
+                    </a:lnL>
+                    <a:lnR w="9525">
+                      <a:solidFill>
+                        <a:srgbClr val="E2DFD8"/>
+                      </a:solidFill>
+                    </a:lnR>
+                    <a:lnT w="9525">
+                      <a:solidFill>
+                        <a:srgbClr val="E2DFD8"/>
+                      </a:solidFill>
+                    </a:lnT>
+                    <a:lnB w="9525">
+                      <a:solidFill>
+                        <a:srgbClr val="E2DFD8"/>
+                      </a:solidFill>
+                    </a:lnB>
+                    <a:solidFill>
+                      <a:srgbClr val="FDFCF9"/>
+                    </a:solidFill>
+                  </a:tcPr>
+                </a:tc>
+              </a:tr>
+              <a:tr h="457200">
+                <a:tc>
+                  <a:txBody>
+                    <a:bodyPr wrap="square"/>
+                    <a:lstStyle/>
+                    <a:p>
+                      <a:r>
+                        <a:rPr sz="1300" b="0">
+                          <a:solidFill>
+                            <a:srgbClr val="4A5568"/>
+                          </a:solidFill>
+                          <a:latin typeface="微軟正黑體"/>
+                          <a:ea typeface="微軟正黑體"/>
+                        </a:rPr>
+                        <a:t>Funnel · OpenSSH</a:t>
+                      </a:r>
+                    </a:p>
+                  </a:txBody>
+                  <a:tcPr marL="109728" marR="109728" marT="45720" marB="45720" anchor="ctr">
+                    <a:lnL w="9525">
+                      <a:solidFill>
+                        <a:srgbClr val="E2DFD8"/>
+                      </a:solidFill>
+                    </a:lnL>
+                    <a:lnR w="9525">
+                      <a:solidFill>
+                        <a:srgbClr val="E2DFD8"/>
+                      </a:solidFill>
+                    </a:lnR>
+                    <a:lnT w="9525">
+                      <a:solidFill>
+                        <a:srgbClr val="E2DFD8"/>
+                      </a:solidFill>
+                    </a:lnT>
+                    <a:lnB w="9525">
+                      <a:solidFill>
+                        <a:srgbClr val="E2DFD8"/>
+                      </a:solidFill>
+                    </a:lnB>
+                    <a:solidFill>
+                      <a:srgbClr val="FDFCF9"/>
+                    </a:solidFill>
+                  </a:tcPr>
+                </a:tc>
+                <a:tc>
+                  <a:txBody>
+                    <a:bodyPr wrap="square"/>
+                    <a:lstStyle/>
+                    <a:p>
+                      <a:r>
+                        <a:rPr sz="1300" b="0">
+                          <a:solidFill>
+                            <a:srgbClr val="4A5568"/>
+                          </a:solidFill>
+                          <a:latin typeface="微軟正黑體"/>
+                          <a:ea typeface="微軟正黑體"/>
+                        </a:rPr>
+                        <a:t>關閉 / 還原成安裝前</a:t>
+                      </a:r>
+                    </a:p>
+                  </a:txBody>
+                  <a:tcPr marL="109728" marR="109728" marT="45720" marB="45720" anchor="ctr">
+                    <a:lnL w="9525">
+                      <a:solidFill>
+                        <a:srgbClr val="E2DFD8"/>
+                      </a:solidFill>
+                    </a:lnL>
+                    <a:lnR w="9525">
+                      <a:solidFill>
+                        <a:srgbClr val="E2DFD8"/>
+                      </a:solidFill>
+                    </a:lnR>
+                    <a:lnT w="9525">
+                      <a:solidFill>
+                        <a:srgbClr val="E2DFD8"/>
+                      </a:solidFill>
+                    </a:lnT>
+                    <a:lnB w="9525">
+                      <a:solidFill>
+                        <a:srgbClr val="E2DFD8"/>
+                      </a:solidFill>
+                    </a:lnB>
+                    <a:solidFill>
+                      <a:srgbClr val="FDFCF9"/>
+                    </a:solidFill>
+                  </a:tcPr>
+                </a:tc>
+              </a:tr>
+              <a:tr h="457200">
+                <a:tc>
+                  <a:txBody>
+                    <a:bodyPr wrap="square"/>
+                    <a:lstStyle/>
+                    <a:p>
+                      <a:r>
+                        <a:rPr sz="1300" b="0">
+                          <a:solidFill>
+                            <a:srgbClr val="4A5568"/>
+                          </a:solidFill>
+                          <a:latin typeface="微軟正黑體"/>
+                          <a:ea typeface="微軟正黑體"/>
+                        </a:rPr>
+                        <a:t>opencode</a:t>
+                      </a:r>
+                    </a:p>
+                  </a:txBody>
+                  <a:tcPr marL="109728" marR="109728" marT="45720" marB="45720" anchor="ctr">
+                    <a:lnL w="9525">
+                      <a:solidFill>
+                        <a:srgbClr val="E2DFD8"/>
+                      </a:solidFill>
+                    </a:lnL>
+                    <a:lnR w="9525">
+                      <a:solidFill>
+                        <a:srgbClr val="E2DFD8"/>
+                      </a:solidFill>
+                    </a:lnR>
+                    <a:lnT w="9525">
+                      <a:solidFill>
+                        <a:srgbClr val="E2DFD8"/>
+                      </a:solidFill>
+                    </a:lnT>
+                    <a:lnB w="9525">
+                      <a:solidFill>
+                        <a:srgbClr val="E2DFD8"/>
+                      </a:solidFill>
+                    </a:lnB>
+                    <a:solidFill>
+                      <a:srgbClr val="FDFCF9"/>
+                    </a:solidFill>
+                  </a:tcPr>
+                </a:tc>
+                <a:tc>
+                  <a:txBody>
+                    <a:bodyPr wrap="square"/>
+                    <a:lstStyle/>
+                    <a:p>
+                      <a:r>
+                        <a:rPr sz="1300" b="0">
+                          <a:solidFill>
+                            <a:srgbClr val="4A5568"/>
+                          </a:solidFill>
+                          <a:latin typeface="微軟正黑體"/>
+                          <a:ea typeface="微軟正黑體"/>
+                        </a:rPr>
+                        <a:t>程式與實驗室設定（其他設定保留）</a:t>
+                      </a:r>
+                    </a:p>
+                  </a:txBody>
+                  <a:tcPr marL="109728" marR="109728" marT="45720" marB="45720" anchor="ctr">
+                    <a:lnL w="9525">
+                      <a:solidFill>
+                        <a:srgbClr val="E2DFD8"/>
+                      </a:solidFill>
+                    </a:lnL>
+                    <a:lnR w="9525">
+                      <a:solidFill>
+                        <a:srgbClr val="E2DFD8"/>
+                      </a:solidFill>
+                    </a:lnR>
+                    <a:lnT w="9525">
+                      <a:solidFill>
+                        <a:srgbClr val="E2DFD8"/>
+                      </a:solidFill>
+                    </a:lnT>
+                    <a:lnB w="9525">
+                      <a:solidFill>
+                        <a:srgbClr val="E2DFD8"/>
+                      </a:solidFill>
+                    </a:lnB>
+                    <a:solidFill>
+                      <a:srgbClr val="FDFCF9"/>
+                    </a:solidFill>
+                  </a:tcPr>
+                </a:tc>
+              </a:tr>
+            </a:tbl>
+          </a:graphicData>
+        </a:graphic>
+      </p:graphicFrame>
+      <p:sp>
+        <p:nvSpPr>
+          <p:cNvPr id="8" name="TextBox 7"/>
+          <p:cNvSpPr txBox="1"/>
+          <p:nvPr/>
+        </p:nvSpPr>
+        <p:spPr>
+          <a:xfrm>
+            <a:off x="5943600" y="5394960"/>
+            <a:ext cx="5699455" cy="365760"/>
+          </a:xfrm>
+          <a:prstGeom prst="rect">
+            <a:avLst/>
+          </a:prstGeom>
+          <a:noFill/>
+        </p:spPr>
+        <p:txBody>
+          <a:bodyPr wrap="square" anchor="t" lIns="0" rIns="0" tIns="0" bIns="0">
+            <a:spAutoFit/>
+          </a:bodyPr>
+          <a:lstStyle/>
+          <a:p>
+            <a:pPr algn="l">
+              <a:spcAft>
+                <a:spcPts val="600"/>
+              </a:spcAft>
+            </a:pPr>
+            <a:r>
+              <a:rPr sz="1200" b="0">
+                <a:solidFill>
+                  <a:srgbClr val="8B9BB4"/>
+                </a:solidFill>
+                <a:latin typeface="微軟正黑體"/>
+                <a:ea typeface="微軟正黑體"/>
+              </a:rPr>
+              <a:t>備份位置：%LOCALAPPDATA%\vllm-opencode-backup</a:t>
+            </a:r>
+          </a:p>
+        </p:txBody>
+      </p:sp>
+    </p:spTree>
+  </p:cSld>
+  <p:clrMapOvr>
+    <a:masterClrMapping/>
+  </p:clrMapOvr>
+</p:sld>
+</file>
+
+<file path=ppt/slides/slide24.xml><?xml version="1.0" encoding="utf-8"?>
+<p:sld xmlns:a="http://schemas.openxmlformats.org/drawingml/2006/main" xmlns:p="http://schemas.openxmlformats.org/presentationml/2006/main" xmlns:r="http://schemas.openxmlformats.org/officeDocument/2006/relationships">
+  <p:cSld>
+    <p:bg>
+      <p:bgPr>
+        <a:solidFill>
           <a:srgbClr val="0F1B2D"/>
         </a:solidFill>
         <a:effectLst/>
@@ -19582,7 +20823,7 @@
                 <a:latin typeface="微軟正黑體"/>
                 <a:ea typeface="微軟正黑體"/>
               </a:rPr>
-              <a:t>實驗室本地 LLM 使用教學 · 23</a:t>
+              <a:t>實驗室本地 LLM 使用教學 · 24</a:t>
             </a:r>
           </a:p>
         </p:txBody>

--- a/docs/實驗室本地LLM使用教學.pptx
+++ b/docs/實驗室本地LLM使用教學.pptx
@@ -8699,7 +8699,7 @@
                 <a:latin typeface="微軟正黑體"/>
                 <a:ea typeface="微軟正黑體"/>
               </a:rPr>
-              <a:t>在專案根目錄執行 deploy.ps1：建環境、自動填好 .env</a:t>
+              <a:t>在 discord\client 執行 deploy.ps1：建環境、自動填好 .env</a:t>
             </a:r>
           </a:p>
         </p:txBody>
@@ -9058,14 +9058,14 @@
               </a:spcAft>
             </a:pPr>
             <a:r>
-              <a:rPr sz="1300" b="0">
-                <a:solidFill>
-                  <a:srgbClr val="8B9BB4"/>
+              <a:rPr sz="1300" b="1">
+                <a:solidFill>
+                  <a:srgbClr val="F0A04B"/>
                 </a:solidFill>
                 <a:latin typeface="Consolas"/>
                 <a:ea typeface="微軟正黑體"/>
               </a:rPr>
-              <a:t># 專案根目錄</a:t>
+              <a:t>cd discord\client</a:t>
             </a:r>
           </a:p>
           <a:p>
@@ -12103,7 +12103,7 @@
                 <a:latin typeface="Consolas"/>
                 <a:ea typeface="微軟正黑體"/>
               </a:rPr>
-              <a:t>host\setup-host.cmd -SkipVllm</a:t>
+              <a:t>server\wsl2\setup-host.cmd -SkipVllm</a:t>
             </a:r>
           </a:p>
           <a:p>
@@ -12530,7 +12530,7 @@
                 <a:latin typeface="Consolas"/>
                 <a:ea typeface="微軟正黑體"/>
               </a:rPr>
-              <a:t># 筆電：雙擊 host\funnel.cmd</a:t>
+              <a:t># 筆電：雙擊 server\wsl2\funnel.cmd</a:t>
             </a:r>
           </a:p>
           <a:p>
@@ -13417,7 +13417,7 @@
                 <a:latin typeface="微軟正黑體"/>
                 <a:ea typeface="微軟正黑體"/>
               </a:rPr>
-              <a:t>日常管理：雙擊 host\vllmctl.cmd</a:t>
+              <a:t>日常管理：雙擊 server\wsl2\vllmctl.cmd</a:t>
             </a:r>
           </a:p>
         </p:txBody>
@@ -19754,7 +19754,7 @@
                 <a:latin typeface="Consolas"/>
                 <a:ea typeface="微軟正黑體"/>
               </a:rPr>
-              <a:t>opencode\host\uninstall-host.cmd</a:t>
+              <a:t>server\wsl2\uninstall-host.cmd</a:t>
             </a:r>
           </a:p>
           <a:p>
@@ -20947,7 +20947,7 @@
                 <a:latin typeface="微軟正黑體"/>
                 <a:ea typeface="微軟正黑體"/>
               </a:rPr>
-              <a:t>筆電主機（opencode\host）</a:t>
+              <a:t>筆電主機（server\wsl2）</a:t>
             </a:r>
           </a:p>
           <a:p>
@@ -21061,7 +21061,7 @@
                 <a:latin typeface="微軟正黑體"/>
                 <a:ea typeface="微軟正黑體"/>
               </a:rPr>
-              <a:t>Discord bot</a:t>
+              <a:t>Discord bot（discord\client）</a:t>
             </a:r>
           </a:p>
           <a:p>
@@ -26617,7 +26617,7 @@
                 <a:latin typeface="微軟正黑體"/>
                 <a:ea typeface="微軟正黑體"/>
               </a:rPr>
-              <a:t>雙擊 opencode\host\setup-host.cmd，同意系統管理員權限</a:t>
+              <a:t>雙擊 server\wsl2\setup-host.cmd，同意系統管理員權限</a:t>
             </a:r>
           </a:p>
         </p:txBody>
@@ -29247,7 +29247,7 @@
                 <a:latin typeface="Consolas"/>
                 <a:ea typeface="微軟正黑體"/>
               </a:rPr>
-              <a:t>bash client/install-client.sh --url &lt;網址&gt; --key &lt;金鑰&gt; --name laptop</a:t>
+              <a:t>bash opencode/client/install-client.sh --url &lt;網址&gt; --key &lt;金鑰&gt; --name laptop</a:t>
             </a:r>
           </a:p>
           <a:p>

--- a/docs/實驗室本地LLM使用教學.pptx
+++ b/docs/實驗室本地LLM使用教學.pptx
@@ -23596,7 +23596,7 @@
                 <a:latin typeface="微軟正黑體"/>
                 <a:ea typeface="微軟正黑體"/>
               </a:rPr>
-              <a:t>留在 ~/.cache/huggingface/hub/；forget 不刪權重，不用的自行刪除</a:t>
+              <a:t>forget 不刪權重；用 hf cache ls 查、hf cache rm 刪（刪資料夾不會釋放）</a:t>
             </a:r>
           </a:p>
         </p:txBody>
